--- a/assets/pptx/catalog-710.pptx
+++ b/assets/pptx/catalog-710.pptx
@@ -3255,7 +3255,7 @@
                 <a:ea typeface="Ebrima"/>
                 <a:cs typeface="Ebrima"/>
               </a:rPr>
-              <a:t>የእኔ ጌታ ተባረክ የእኔ ጌታ (4x)</a:t>
+              <a:t>የእኔ ጌታ ተባረክ የእኔ ጌታ 4x</a:t>
             </a:r>
           </a:p>
         </p:txBody>
@@ -3358,7 +3358,7 @@
                 <a:ea typeface="Ebrima"/>
                 <a:cs typeface="Ebrima"/>
               </a:rPr>
-              <a:t>ስሙኝ እንጂ (2x)</a:t>
+              <a:t>ስሙኝ እንጂ 2x</a:t>
             </a:r>
           </a:p>
           <a:p>
@@ -3412,7 +3412,7 @@
                 <a:ea typeface="Ebrima"/>
                 <a:cs typeface="Ebrima"/>
               </a:rPr>
-              <a:t>ስሙኝ እንጂ (2x)</a:t>
+              <a:t>ስሙኝ እንጂ 2x</a:t>
             </a:r>
           </a:p>
           <a:p>
@@ -3466,7 +3466,7 @@
                 <a:ea typeface="Ebrima"/>
                 <a:cs typeface="Ebrima"/>
               </a:rPr>
-              <a:t>ስሙኝ እንጂ (2x)</a:t>
+              <a:t>ስሙኝ እንጂ 2x</a:t>
             </a:r>
           </a:p>
           <a:p>
@@ -3520,7 +3520,7 @@
                 <a:ea typeface="Ebrima"/>
                 <a:cs typeface="Ebrima"/>
               </a:rPr>
-              <a:t>ስሙኝ እንጂ (2x)</a:t>
+              <a:t>ስሙኝ እንጂ 2x</a:t>
             </a:r>
           </a:p>
           <a:p>
@@ -3574,7 +3574,7 @@
                 <a:ea typeface="Ebrima"/>
                 <a:cs typeface="Ebrima"/>
               </a:rPr>
-              <a:t>ስሙኝ እንጂ (2x)</a:t>
+              <a:t>ስሙኝ እንጂ 2x</a:t>
             </a:r>
           </a:p>
           <a:p>
@@ -3628,7 +3628,7 @@
                 <a:ea typeface="Ebrima"/>
                 <a:cs typeface="Ebrima"/>
               </a:rPr>
-              <a:t>ስሙኝ እንጂ (2x)</a:t>
+              <a:t>ስሙኝ እንጂ 2x</a:t>
             </a:r>
           </a:p>
         </p:txBody>
@@ -3695,7 +3695,7 @@
                 <a:ea typeface="Ebrima"/>
                 <a:cs typeface="Ebrima"/>
               </a:rPr>
-              <a:t>ምሥጋናዬ (4x)</a:t>
+              <a:t>ምሥጋናዬ 4x</a:t>
             </a:r>
           </a:p>
           <a:p>
@@ -3713,7 +3713,7 @@
                 <a:ea typeface="Ebrima"/>
                 <a:cs typeface="Ebrima"/>
               </a:rPr>
-              <a:t>ይድረስ ለአንተ ብቻ ጌታዬ (2x)</a:t>
+              <a:t>ይድረስ ለአንተ ብቻ ጌታዬ 2x</a:t>
             </a:r>
           </a:p>
         </p:txBody>
@@ -3919,7 +3919,7 @@
                 <a:ea typeface="Ebrima"/>
                 <a:cs typeface="Ebrima"/>
               </a:rPr>
-              <a:t>የተዓምራቱን ውበት ያሳያል (2x)</a:t>
+              <a:t>የተዓምራቱን ውበት ያሳያል 2x</a:t>
             </a:r>
           </a:p>
         </p:txBody>
@@ -4125,7 +4125,7 @@
                 <a:ea typeface="Ebrima"/>
                 <a:cs typeface="Ebrima"/>
               </a:rPr>
-              <a:t>የተዓምራቱን ውበት ያሳያል (2x)</a:t>
+              <a:t>የተዓምራቱን ውበት ያሳያል 2x</a:t>
             </a:r>
           </a:p>
         </p:txBody>
@@ -4192,7 +4192,7 @@
                 <a:ea typeface="Ebrima"/>
                 <a:cs typeface="Ebrima"/>
               </a:rPr>
-              <a:t>ስለ አንተ በጆሮዬ ከሰማሁት ይልቅ (2x)</a:t>
+              <a:t>ስለ አንተ በጆሮዬ ከሰማሁት ይልቅ 2x</a:t>
             </a:r>
           </a:p>
           <a:p>
@@ -4210,7 +4210,7 @@
                 <a:ea typeface="Ebrima"/>
                 <a:cs typeface="Ebrima"/>
               </a:rPr>
-              <a:t>በዓይኔ ያየሁት ለእኔ ሆነብኝ ድንቅ (2x)</a:t>
+              <a:t>በዓይኔ ያየሁት ለእኔ ሆነብኝ ድንቅ 2x</a:t>
             </a:r>
           </a:p>
         </p:txBody>
@@ -4277,7 +4277,7 @@
                 <a:ea typeface="Ebrima"/>
                 <a:cs typeface="Ebrima"/>
               </a:rPr>
-              <a:t>የእኔ ጌታ ተባረክ የእኔ ጌታ (4x)</a:t>
+              <a:t>የእኔ ጌታ ተባረክ የእኔ ጌታ 4x</a:t>
             </a:r>
           </a:p>
         </p:txBody>
@@ -4344,7 +4344,7 @@
                 <a:ea typeface="Ebrima"/>
                 <a:cs typeface="Ebrima"/>
               </a:rPr>
-              <a:t>እግዚአብሔር ለምን እንዲህ አረክ አይባልም (2x)</a:t>
+              <a:t>እግዚአብሔር ለምን እንዲህ አረክ አይባልም 2x</a:t>
             </a:r>
           </a:p>
           <a:p>
@@ -4362,7 +4362,7 @@
                 <a:ea typeface="Ebrima"/>
                 <a:cs typeface="Ebrima"/>
               </a:rPr>
-              <a:t>የሚሰራውን ያውቃል ፍፁም አይዘነጋም (2x)</a:t>
+              <a:t>የሚሰራውን ያውቃል ፍፁም አይዘነጋም 2x</a:t>
             </a:r>
           </a:p>
         </p:txBody>
@@ -4429,7 +4429,7 @@
                 <a:ea typeface="Ebrima"/>
                 <a:cs typeface="Ebrima"/>
               </a:rPr>
-              <a:t>የእኔ ጌታ ተባረክ የእኔ ጌታ (4x)</a:t>
+              <a:t>የእኔ ጌታ ተባረክ የእኔ ጌታ 4x</a:t>
             </a:r>
           </a:p>
         </p:txBody>
@@ -4496,7 +4496,7 @@
                 <a:ea typeface="Ebrima"/>
                 <a:cs typeface="Ebrima"/>
               </a:rPr>
-              <a:t>ምሥጋናዬ (4x)</a:t>
+              <a:t>ምሥጋናዬ 4x</a:t>
             </a:r>
           </a:p>
           <a:p>
@@ -4514,7 +4514,7 @@
                 <a:ea typeface="Ebrima"/>
                 <a:cs typeface="Ebrima"/>
               </a:rPr>
-              <a:t>ይድረስ ለአንተ ብቻ ጌታዬ (2x)</a:t>
+              <a:t>ይድረስ ለአንተ ብቻ ጌታዬ 2x</a:t>
             </a:r>
           </a:p>
         </p:txBody>
@@ -4581,7 +4581,7 @@
                 <a:ea typeface="Ebrima"/>
                 <a:cs typeface="Ebrima"/>
               </a:rPr>
-              <a:t>እግዚአብሔር ህዝቡን መታደግን ያውቃል (2x)</a:t>
+              <a:t>እግዚአብሔር ህዝቡን መታደግን ያውቃል 2x</a:t>
             </a:r>
           </a:p>
           <a:p>
@@ -4599,7 +4599,7 @@
                 <a:ea typeface="Ebrima"/>
                 <a:cs typeface="Ebrima"/>
               </a:rPr>
-              <a:t>ካስፈለገ ደግሞ ፀሐይን ያቆማል (2x)</a:t>
+              <a:t>ካስፈለገ ደግሞ ፀሐይን ያቆማል 2x</a:t>
             </a:r>
           </a:p>
         </p:txBody>
@@ -4666,7 +4666,7 @@
                 <a:ea typeface="Ebrima"/>
                 <a:cs typeface="Ebrima"/>
               </a:rPr>
-              <a:t>የእኔ ጌታ ተባረክ የእኔ ጌታ (4x)</a:t>
+              <a:t>የእኔ ጌታ ተባረክ የእኔ ጌታ 4x</a:t>
             </a:r>
           </a:p>
         </p:txBody>
@@ -4751,7 +4751,7 @@
                 <a:ea typeface="Ebrima"/>
                 <a:cs typeface="Ebrima"/>
               </a:rPr>
-              <a:t>ዓለም ሁሉ በሙሉ የእርሱ ነው (2x)</a:t>
+              <a:t>ዓለም ሁሉ በሙሉ የእርሱ ነው 2x</a:t>
             </a:r>
           </a:p>
         </p:txBody>
